--- a/04_Final_Abgabe_v2_1/04_Decks/AMAVIO_Living_One_Pager_v2_2_FINAL.pptx
+++ b/04_Final_Abgabe_v2_1/04_Decks/AMAVIO_Living_One_Pager_v2_2_FINAL.pptx
@@ -542,7 +542,7 @@
           </a:p>
           <a:p xmlns:a="http://schemas.openxmlformats.org/drawingml/2006/main">
             <a:r>
-              <a:t>- Internal: AMAVIO Produktarchitektur und Businessplan v1.7 (Stand 28. Juli 2026).</a:t>
+              <a:t>- Internal: AMAVIO Produktarchitektur und Businessplan v2.2 (Stand 28. Juli 2026).</a:t>
             </a:r>
           </a:p>
           <a:p xmlns:a="http://schemas.openxmlformats.org/drawingml/2006/main">
